--- a/Portfolio_Muhammad_Ulul_Albab.pptx
+++ b/Portfolio_Muhammad_Ulul_Albab.pptx
@@ -10,6 +10,9 @@
     <p:sldId id="258" r:id="rId9"/>
     <p:sldId id="259" r:id="rId10"/>
     <p:sldId id="260" r:id="rId11"/>
+    <p:sldId id="261" r:id="rId12"/>
+    <p:sldId id="262" r:id="rId13"/>
+    <p:sldId id="263" r:id="rId14"/>
   </p:sldIdLst>
   <p:sldSz cx="12191695" cy="6858000" type="screen4x3"/>
   <p:notesSz cx="6858000" cy="9144000"/>
@@ -3102,13 +3105,58 @@
       <p:grpSpPr/>
       <p:sp>
         <p:nvSpPr>
-          <p:cNvPr id="2" name="TextBox 1"/>
+          <p:cNvPr id="2" name="Rectangle 1"/>
+          <p:cNvSpPr/>
+          <p:nvPr/>
+        </p:nvSpPr>
+        <p:spPr>
+          <a:xfrm>
+            <a:off x="731520" y="2011680"/>
+            <a:ext cx="137160" cy="2926080"/>
+          </a:xfrm>
+          <a:prstGeom prst="rect">
+            <a:avLst/>
+          </a:prstGeom>
+          <a:solidFill>
+            <a:srgbClr val="06B6D4"/>
+          </a:solidFill>
+          <a:ln>
+            <a:solidFill>
+              <a:srgbClr val="06B6D4"/>
+            </a:solidFill>
+          </a:ln>
+        </p:spPr>
+        <p:style>
+          <a:lnRef idx="1">
+            <a:schemeClr val="accent1"/>
+          </a:lnRef>
+          <a:fillRef idx="3">
+            <a:schemeClr val="accent1"/>
+          </a:fillRef>
+          <a:effectRef idx="2">
+            <a:schemeClr val="accent1"/>
+          </a:effectRef>
+          <a:fontRef idx="minor">
+            <a:schemeClr val="lt1"/>
+          </a:fontRef>
+        </p:style>
+        <p:txBody>
+          <a:bodyPr rtlCol="0" anchor="ctr"/>
+          <a:lstStyle/>
+          <a:p>
+            <a:pPr algn="ctr"/>
+          </a:p>
+        </p:txBody>
+      </p:sp>
+      <p:sp>
+        <p:nvSpPr>
+          <p:cNvPr id="3" name="TextBox 2"/>
           <p:cNvSpPr txBox="1"/>
           <p:nvPr/>
         </p:nvSpPr>
         <p:spPr>
           <a:xfrm>
-            <a:off x="1097280" y="2011680"/>
+            <a:off x="1097280" y="1828800"/>
             <a:ext cx="10058400" cy="3200400"/>
           </a:xfrm>
           <a:prstGeom prst="rect">
@@ -3123,27 +3171,21 @@
           <a:lstStyle/>
           <a:p>
             <a:pPr>
-              <a:spcAft>
-                <a:spcPts val="2000"/>
-              </a:spcAft>
-              <a:defRPr sz="1400" b="1">
+              <a:defRPr sz="1200" b="1">
                 <a:solidFill>
                   <a:srgbClr val="06B6D4"/>
                 </a:solidFill>
               </a:defRPr>
             </a:pPr>
             <a:r>
-              <a:t>AVAILABLE FOR FREELANCE PROJECT</a:t>
-            </a:r>
-          </a:p>
-          <a:p>
-            <a:pPr>
-              <a:spcAft>
-                <a:spcPts val="1000"/>
-              </a:spcAft>
+              <a:t>AVAILABLE FOR FREELANCE &amp; COLLABORATION</a:t>
+            </a:r>
+          </a:p>
+          <a:p>
+            <a:pPr>
               <a:defRPr sz="4400" b="1">
                 <a:solidFill>
-                  <a:srgbClr val="F1F5F9"/>
+                  <a:srgbClr val="F8FAFC"/>
                 </a:solidFill>
               </a:defRPr>
             </a:pPr>
@@ -3153,29 +3195,26 @@
           </a:p>
           <a:p>
             <a:pPr>
-              <a:spcAft>
-                <a:spcPts val="2000"/>
-              </a:spcAft>
-              <a:defRPr sz="2000">
+              <a:defRPr sz="2200">
                 <a:solidFill>
                   <a:srgbClr val="94A3B8"/>
                 </a:solidFill>
               </a:defRPr>
             </a:pPr>
             <a:r>
-              <a:t>Web Application Developer &amp; Full-Stack Enthusiast</a:t>
-            </a:r>
-          </a:p>
-          <a:p>
-            <a:pPr>
-              <a:defRPr sz="1400">
-                <a:solidFill>
-                  <a:srgbClr val="94A3B8"/>
-                </a:solidFill>
-              </a:defRPr>
-            </a:pPr>
-            <a:r>
-              <a:t>Portofolio Profesional &amp; Rekam Jejak Solusi Digital Kustom</a:t>
+              <a:t>Fullstack &amp; AI Application Developer</a:t>
+            </a:r>
+          </a:p>
+          <a:p>
+            <a:pPr>
+              <a:defRPr sz="1400" i="1">
+                <a:solidFill>
+                  <a:srgbClr val="06B6D4"/>
+                </a:solidFill>
+              </a:defRPr>
+            </a:pPr>
+            <a:r>
+              <a:t>Perpaduan Ketelitian Analisis Farmasi &amp; Rekayasa Perangkat Lunak Modern</a:t>
             </a:r>
           </a:p>
         </p:txBody>
@@ -3214,8 +3253,8 @@
         </p:nvSpPr>
         <p:spPr>
           <a:xfrm>
-            <a:off x="914400" y="914400"/>
-            <a:ext cx="10058400" cy="5029200"/>
+            <a:off x="731520" y="457200"/>
+            <a:ext cx="10728655" cy="914400"/>
           </a:xfrm>
           <a:prstGeom prst="rect">
             <a:avLst/>
@@ -3229,98 +3268,197 @@
           <a:lstStyle/>
           <a:p>
             <a:pPr>
-              <a:spcAft>
-                <a:spcPts val="3000"/>
-              </a:spcAft>
-              <a:defRPr sz="3200" b="1">
-                <a:solidFill>
-                  <a:srgbClr val="F1F5F9"/>
-                </a:solidFill>
-              </a:defRPr>
-            </a:pPr>
-            <a:r>
-              <a:t>Keahlian &amp; Core Tech Stack</a:t>
-            </a:r>
-          </a:p>
-          <a:p>
-            <a:pPr>
-              <a:defRPr sz="1800" b="1">
+              <a:defRPr sz="1100" b="1">
                 <a:solidFill>
                   <a:srgbClr val="06B6D4"/>
                 </a:solidFill>
-              </a:defRPr>
-            </a:pPr>
-            <a:r>
-              <a:t>• Frontend Architecture</a:t>
-            </a:r>
-          </a:p>
-          <a:p>
-            <a:pPr>
-              <a:spcAft>
-                <a:spcPts val="1500"/>
-              </a:spcAft>
+                <a:latin typeface="Arial"/>
+              </a:defRPr>
+            </a:pPr>
+            <a:r>
+              <a:t>PROFIL PROFESIONAL</a:t>
+            </a:r>
+          </a:p>
+          <a:p>
+            <a:pPr>
+              <a:defRPr sz="2600" b="1">
+                <a:solidFill>
+                  <a:srgbClr val="F8FAFC"/>
+                </a:solidFill>
+                <a:latin typeface="Arial"/>
+              </a:defRPr>
+            </a:pPr>
+            <a:r>
+              <a:t>Tentang Saya &amp; Latar Belakang Analitis</a:t>
+            </a:r>
+          </a:p>
+        </p:txBody>
+      </p:sp>
+      <p:sp>
+        <p:nvSpPr>
+          <p:cNvPr id="3" name="Rounded Rectangle 2"/>
+          <p:cNvSpPr/>
+          <p:nvPr/>
+        </p:nvSpPr>
+        <p:spPr>
+          <a:xfrm>
+            <a:off x="731520" y="1645920"/>
+            <a:ext cx="5120640" cy="4389120"/>
+          </a:xfrm>
+          <a:prstGeom prst="roundRect">
+            <a:avLst/>
+          </a:prstGeom>
+          <a:solidFill>
+            <a:srgbClr val="1E293B"/>
+          </a:solidFill>
+          <a:ln>
+            <a:solidFill>
+              <a:srgbClr val="334155"/>
+            </a:solidFill>
+          </a:ln>
+        </p:spPr>
+        <p:style>
+          <a:lnRef idx="1">
+            <a:schemeClr val="accent1"/>
+          </a:lnRef>
+          <a:fillRef idx="3">
+            <a:schemeClr val="accent1"/>
+          </a:fillRef>
+          <a:effectRef idx="2">
+            <a:schemeClr val="accent1"/>
+          </a:effectRef>
+          <a:fontRef idx="minor">
+            <a:schemeClr val="lt1"/>
+          </a:fontRef>
+        </p:style>
+        <p:txBody>
+          <a:bodyPr rtlCol="0" anchor="ctr" wrap="square" lIns="274320" tIns="274320"/>
+          <a:lstStyle/>
+          <a:p>
+            <a:pPr algn="ctr">
+              <a:defRPr b="1" sz="1800">
+                <a:solidFill>
+                  <a:srgbClr val="06B6D4"/>
+                </a:solidFill>
+              </a:defRPr>
+            </a:pPr>
+            <a:r>
+              <a:t>Pendidikan &amp; Fondasi Eksakta</a:t>
+            </a:r>
+          </a:p>
+          <a:p>
+            <a:pPr>
               <a:defRPr sz="1400">
                 <a:solidFill>
+                  <a:srgbClr val="F8FAFC"/>
+                </a:solidFill>
+              </a:defRPr>
+            </a:pPr>
+            <a:r>
+              <a:t>• Universitas Pakuan — Program Studi Farmasi</a:t>
+            </a:r>
+          </a:p>
+          <a:p>
+            <a:br/>
+            <a:pPr>
+              <a:defRPr sz="1300">
+                <a:solidFill>
                   <a:srgbClr val="94A3B8"/>
                 </a:solidFill>
               </a:defRPr>
             </a:pPr>
             <a:r>
-              <a:t>   HTML5, CSS3, Modern JavaScript (ES6+), Tailwind CSS, dan desain UI/UX responsif yang bersih.</a:t>
-            </a:r>
-          </a:p>
-          <a:p>
-            <a:pPr>
-              <a:defRPr sz="1800" b="1">
-                <a:solidFill>
-                  <a:srgbClr val="06B6D4"/>
-                </a:solidFill>
-              </a:defRPr>
-            </a:pPr>
-            <a:r>
-              <a:t>• Web Application &amp; Dashboard</a:t>
-            </a:r>
-          </a:p>
-          <a:p>
-            <a:pPr>
-              <a:spcAft>
-                <a:spcPts val="1500"/>
-              </a:spcAft>
-              <a:defRPr sz="1400">
+              <a:t>Latar belakang Farmasi membentuk ketelitian tinggi, logika eksploratif, serta pola pikir analitis eksakta yang kuat dalam memecahkan masalah kompleks.</a:t>
+            </a:r>
+          </a:p>
+        </p:txBody>
+      </p:sp>
+      <p:sp>
+        <p:nvSpPr>
+          <p:cNvPr id="4" name="Rounded Rectangle 3"/>
+          <p:cNvSpPr/>
+          <p:nvPr/>
+        </p:nvSpPr>
+        <p:spPr>
+          <a:xfrm>
+            <a:off x="6217920" y="1645920"/>
+            <a:ext cx="5212080" cy="4389120"/>
+          </a:xfrm>
+          <a:prstGeom prst="roundRect">
+            <a:avLst/>
+          </a:prstGeom>
+          <a:solidFill>
+            <a:srgbClr val="1E293B"/>
+          </a:solidFill>
+          <a:ln>
+            <a:solidFill>
+              <a:srgbClr val="334155"/>
+            </a:solidFill>
+          </a:ln>
+        </p:spPr>
+        <p:style>
+          <a:lnRef idx="1">
+            <a:schemeClr val="accent1"/>
+          </a:lnRef>
+          <a:fillRef idx="3">
+            <a:schemeClr val="accent1"/>
+          </a:fillRef>
+          <a:effectRef idx="2">
+            <a:schemeClr val="accent1"/>
+          </a:effectRef>
+          <a:fontRef idx="minor">
+            <a:schemeClr val="lt1"/>
+          </a:fontRef>
+        </p:style>
+        <p:txBody>
+          <a:bodyPr rtlCol="0" anchor="ctr" wrap="square" lIns="274320" tIns="274320"/>
+          <a:lstStyle/>
+          <a:p>
+            <a:pPr algn="ctr">
+              <a:defRPr b="1" sz="1800">
+                <a:solidFill>
+                  <a:srgbClr val="F43F5E"/>
+                </a:solidFill>
+              </a:defRPr>
+            </a:pPr>
+            <a:r>
+              <a:t>Transisi Ke Software Engineering</a:t>
+            </a:r>
+          </a:p>
+          <a:p>
+            <a:pPr>
+              <a:defRPr sz="1300">
                 <a:solidFill>
                   <a:srgbClr val="94A3B8"/>
                 </a:solidFill>
               </a:defRPr>
             </a:pPr>
             <a:r>
-              <a:t>   Pengembangan sistem manajemen data, kalkulator parameter fungsional, dan panel kontrol interaktif.</a:t>
-            </a:r>
-          </a:p>
-          <a:p>
-            <a:pPr>
-              <a:defRPr sz="1800" b="1">
-                <a:solidFill>
-                  <a:srgbClr val="06B6D4"/>
-                </a:solidFill>
-              </a:defRPr>
-            </a:pPr>
-            <a:r>
-              <a:t>• Backend &amp; Database</a:t>
-            </a:r>
-          </a:p>
-          <a:p>
-            <a:pPr>
-              <a:spcAft>
-                <a:spcPts val="1500"/>
-              </a:spcAft>
-              <a:defRPr sz="1400">
+              <a:t>• Fokus pada pembentukan arsitektur sistem yang bersih, efisien, dan siap pakai di lingkungan cloud.</a:t>
+            </a:r>
+          </a:p>
+          <a:p>
+            <a:pPr>
+              <a:defRPr sz="1300">
                 <a:solidFill>
                   <a:srgbClr val="94A3B8"/>
                 </a:solidFill>
               </a:defRPr>
             </a:pPr>
             <a:r>
-              <a:t>   Integrasi database terstruktur, manajemen endpoint, dan arsitektur logika program yang efisien.</a:t>
+              <a:t>• Menguasai pemecahan masalah teknis end-to-end: dari profil memori PyTorch/Docker hingga optimasi database.</a:t>
+            </a:r>
+          </a:p>
+          <a:p>
+            <a:pPr>
+              <a:defRPr sz="1300">
+                <a:solidFill>
+                  <a:srgbClr val="94A3B8"/>
+                </a:solidFill>
+              </a:defRPr>
+            </a:pPr>
+            <a:r>
+              <a:t>• Komitmen pada pembelajaran berkelanjutan tanpa ragu menghadapi tantangan teknologi baru.</a:t>
             </a:r>
           </a:p>
         </p:txBody>
@@ -3359,8 +3497,8 @@
         </p:nvSpPr>
         <p:spPr>
           <a:xfrm>
-            <a:off x="914400" y="914400"/>
-            <a:ext cx="10058400" cy="5029200"/>
+            <a:off x="731520" y="457200"/>
+            <a:ext cx="10728655" cy="914400"/>
           </a:xfrm>
           <a:prstGeom prst="rect">
             <a:avLst/>
@@ -3374,77 +3512,292 @@
           <a:lstStyle/>
           <a:p>
             <a:pPr>
-              <a:spcAft>
-                <a:spcPts val="2000"/>
-              </a:spcAft>
-              <a:defRPr sz="3200" b="1">
-                <a:solidFill>
-                  <a:srgbClr val="F1F5F9"/>
-                </a:solidFill>
-              </a:defRPr>
-            </a:pPr>
-            <a:r>
-              <a:t>Featured Project: Clinical Suite Dashboard</a:t>
-            </a:r>
-          </a:p>
-          <a:p>
-            <a:pPr>
-              <a:spcAft>
-                <a:spcPts val="2000"/>
-              </a:spcAft>
-              <a:defRPr sz="1800">
+              <a:defRPr sz="1100" b="1">
                 <a:solidFill>
                   <a:srgbClr val="06B6D4"/>
                 </a:solidFill>
-              </a:defRPr>
-            </a:pPr>
-            <a:r>
-              <a:t>Sistem Manajemen &amp; Kalkulator Parameter Medis Fungsional</a:t>
-            </a:r>
-          </a:p>
-          <a:p>
-            <a:pPr>
-              <a:spcAft>
-                <a:spcPts val="1000"/>
-              </a:spcAft>
-              <a:defRPr sz="1500">
-                <a:solidFill>
-                  <a:srgbClr val="94A3B8"/>
-                </a:solidFill>
-              </a:defRPr>
-            </a:pPr>
-            <a:r>
-              <a:t>✓ Aplikasi web interaktif dengan fitur pencatatan data dan parameter terstruktur.</a:t>
-            </a:r>
-          </a:p>
-          <a:p>
-            <a:pPr>
-              <a:spcAft>
-                <a:spcPts val="1000"/>
-              </a:spcAft>
-              <a:defRPr sz="1500">
-                <a:solidFill>
-                  <a:srgbClr val="94A3B8"/>
-                </a:solidFill>
-              </a:defRPr>
-            </a:pPr>
-            <a:r>
-              <a:t>✓ Dilengkapi kalkulator parameter otomatis untuk akurasi perhitungan.</a:t>
-            </a:r>
-          </a:p>
-          <a:p>
-            <a:pPr>
-              <a:spcAft>
-                <a:spcPts val="1000"/>
-              </a:spcAft>
-              <a:defRPr sz="1500">
-                <a:solidFill>
-                  <a:srgbClr val="94A3B8"/>
-                </a:solidFill>
-              </a:defRPr>
-            </a:pPr>
-            <a:r>
-              <a:t>✓ Antarmuka bersih, responsif, dan dirancang untuk efisiensi alur kerja operasional.</a:t>
+                <a:latin typeface="Arial"/>
+              </a:defRPr>
+            </a:pPr>
+            <a:r>
+              <a:t>TECHNICAL STACK</a:t>
+            </a:r>
+          </a:p>
+          <a:p>
+            <a:pPr>
+              <a:defRPr sz="2600" b="1">
+                <a:solidFill>
+                  <a:srgbClr val="F8FAFC"/>
+                </a:solidFill>
+                <a:latin typeface="Arial"/>
+              </a:defRPr>
+            </a:pPr>
+            <a:r>
+              <a:t>Keahlian &amp; Ekosistem Teknologi</a:t>
+            </a:r>
+          </a:p>
+        </p:txBody>
+      </p:sp>
+      <p:sp>
+        <p:nvSpPr>
+          <p:cNvPr id="3" name="Rounded Rectangle 2"/>
+          <p:cNvSpPr/>
+          <p:nvPr/>
+        </p:nvSpPr>
+        <p:spPr>
+          <a:xfrm>
+            <a:off x="731520" y="1645920"/>
+            <a:ext cx="5212080" cy="2011680"/>
+          </a:xfrm>
+          <a:prstGeom prst="roundRect">
+            <a:avLst/>
+          </a:prstGeom>
+          <a:solidFill>
+            <a:srgbClr val="1E293B"/>
+          </a:solidFill>
+          <a:ln>
+            <a:solidFill>
+              <a:srgbClr val="334155"/>
+            </a:solidFill>
+          </a:ln>
+        </p:spPr>
+        <p:style>
+          <a:lnRef idx="1">
+            <a:schemeClr val="accent1"/>
+          </a:lnRef>
+          <a:fillRef idx="3">
+            <a:schemeClr val="accent1"/>
+          </a:fillRef>
+          <a:effectRef idx="2">
+            <a:schemeClr val="accent1"/>
+          </a:effectRef>
+          <a:fontRef idx="minor">
+            <a:schemeClr val="lt1"/>
+          </a:fontRef>
+        </p:style>
+        <p:txBody>
+          <a:bodyPr rtlCol="0" anchor="ctr" wrap="square" lIns="274320" tIns="182880"/>
+          <a:lstStyle/>
+          <a:p>
+            <a:pPr algn="ctr">
+              <a:defRPr b="1" sz="1600">
+                <a:solidFill>
+                  <a:srgbClr val="06B6D4"/>
+                </a:solidFill>
+              </a:defRPr>
+            </a:pPr>
+            <a:r>
+              <a:t>Frontend &amp; Mobile</a:t>
+            </a:r>
+          </a:p>
+          <a:p>
+            <a:pPr>
+              <a:defRPr sz="1300">
+                <a:solidFill>
+                  <a:srgbClr val="F8FAFC"/>
+                </a:solidFill>
+              </a:defRPr>
+            </a:pPr>
+            <a:r>
+              <a:t>React, React Native, Expo, Tailwind CSS, Vite, HTML/JS</a:t>
+            </a:r>
+          </a:p>
+        </p:txBody>
+      </p:sp>
+      <p:sp>
+        <p:nvSpPr>
+          <p:cNvPr id="4" name="Rounded Rectangle 3"/>
+          <p:cNvSpPr/>
+          <p:nvPr/>
+        </p:nvSpPr>
+        <p:spPr>
+          <a:xfrm>
+            <a:off x="6217920" y="1645920"/>
+            <a:ext cx="5212080" cy="2011680"/>
+          </a:xfrm>
+          <a:prstGeom prst="roundRect">
+            <a:avLst/>
+          </a:prstGeom>
+          <a:solidFill>
+            <a:srgbClr val="1E293B"/>
+          </a:solidFill>
+          <a:ln>
+            <a:solidFill>
+              <a:srgbClr val="334155"/>
+            </a:solidFill>
+          </a:ln>
+        </p:spPr>
+        <p:style>
+          <a:lnRef idx="1">
+            <a:schemeClr val="accent1"/>
+          </a:lnRef>
+          <a:fillRef idx="3">
+            <a:schemeClr val="accent1"/>
+          </a:fillRef>
+          <a:effectRef idx="2">
+            <a:schemeClr val="accent1"/>
+          </a:effectRef>
+          <a:fontRef idx="minor">
+            <a:schemeClr val="lt1"/>
+          </a:fontRef>
+        </p:style>
+        <p:txBody>
+          <a:bodyPr rtlCol="0" anchor="ctr" wrap="square" lIns="274320" tIns="182880"/>
+          <a:lstStyle/>
+          <a:p>
+            <a:pPr algn="ctr">
+              <a:defRPr b="1" sz="1600">
+                <a:solidFill>
+                  <a:srgbClr val="F43F5E"/>
+                </a:solidFill>
+              </a:defRPr>
+            </a:pPr>
+            <a:r>
+              <a:t>Backend &amp; API</a:t>
+            </a:r>
+          </a:p>
+          <a:p>
+            <a:pPr>
+              <a:defRPr sz="1300">
+                <a:solidFill>
+                  <a:srgbClr val="F8FAFC"/>
+                </a:solidFill>
+              </a:defRPr>
+            </a:pPr>
+            <a:r>
+              <a:t>FastAPI (Python), Laravel 11 (PHP), Node.js / Express</a:t>
+            </a:r>
+          </a:p>
+        </p:txBody>
+      </p:sp>
+      <p:sp>
+        <p:nvSpPr>
+          <p:cNvPr id="5" name="Rounded Rectangle 4"/>
+          <p:cNvSpPr/>
+          <p:nvPr/>
+        </p:nvSpPr>
+        <p:spPr>
+          <a:xfrm>
+            <a:off x="731520" y="3931920"/>
+            <a:ext cx="5212080" cy="2011680"/>
+          </a:xfrm>
+          <a:prstGeom prst="roundRect">
+            <a:avLst/>
+          </a:prstGeom>
+          <a:solidFill>
+            <a:srgbClr val="1E293B"/>
+          </a:solidFill>
+          <a:ln>
+            <a:solidFill>
+              <a:srgbClr val="334155"/>
+            </a:solidFill>
+          </a:ln>
+        </p:spPr>
+        <p:style>
+          <a:lnRef idx="1">
+            <a:schemeClr val="accent1"/>
+          </a:lnRef>
+          <a:fillRef idx="3">
+            <a:schemeClr val="accent1"/>
+          </a:fillRef>
+          <a:effectRef idx="2">
+            <a:schemeClr val="accent1"/>
+          </a:effectRef>
+          <a:fontRef idx="minor">
+            <a:schemeClr val="lt1"/>
+          </a:fontRef>
+        </p:style>
+        <p:txBody>
+          <a:bodyPr rtlCol="0" anchor="ctr" wrap="square" lIns="274320" tIns="182880"/>
+          <a:lstStyle/>
+          <a:p>
+            <a:pPr algn="ctr">
+              <a:defRPr b="1" sz="1600">
+                <a:solidFill>
+                  <a:srgbClr val="8B5CF6"/>
+                </a:solidFill>
+              </a:defRPr>
+            </a:pPr>
+            <a:r>
+              <a:t>AI &amp; Data Intelligence</a:t>
+            </a:r>
+          </a:p>
+          <a:p>
+            <a:pPr>
+              <a:defRPr sz="1300">
+                <a:solidFill>
+                  <a:srgbClr val="F8FAFC"/>
+                </a:solidFill>
+              </a:defRPr>
+            </a:pPr>
+            <a:r>
+              <a:t>Gemini RAG API, PyTorch, SentenceTransformers, pgvector</a:t>
+            </a:r>
+          </a:p>
+        </p:txBody>
+      </p:sp>
+      <p:sp>
+        <p:nvSpPr>
+          <p:cNvPr id="6" name="Rounded Rectangle 5"/>
+          <p:cNvSpPr/>
+          <p:nvPr/>
+        </p:nvSpPr>
+        <p:spPr>
+          <a:xfrm>
+            <a:off x="6217920" y="3931920"/>
+            <a:ext cx="5212080" cy="2011680"/>
+          </a:xfrm>
+          <a:prstGeom prst="roundRect">
+            <a:avLst/>
+          </a:prstGeom>
+          <a:solidFill>
+            <a:srgbClr val="1E293B"/>
+          </a:solidFill>
+          <a:ln>
+            <a:solidFill>
+              <a:srgbClr val="334155"/>
+            </a:solidFill>
+          </a:ln>
+        </p:spPr>
+        <p:style>
+          <a:lnRef idx="1">
+            <a:schemeClr val="accent1"/>
+          </a:lnRef>
+          <a:fillRef idx="3">
+            <a:schemeClr val="accent1"/>
+          </a:fillRef>
+          <a:effectRef idx="2">
+            <a:schemeClr val="accent1"/>
+          </a:effectRef>
+          <a:fontRef idx="minor">
+            <a:schemeClr val="lt1"/>
+          </a:fontRef>
+        </p:style>
+        <p:txBody>
+          <a:bodyPr rtlCol="0" anchor="ctr" wrap="square" lIns="274320" tIns="182880"/>
+          <a:lstStyle/>
+          <a:p>
+            <a:pPr algn="ctr">
+              <a:defRPr b="1" sz="1600">
+                <a:solidFill>
+                  <a:srgbClr val="10B981"/>
+                </a:solidFill>
+              </a:defRPr>
+            </a:pPr>
+            <a:r>
+              <a:t>Database &amp; Cloud</a:t>
+            </a:r>
+          </a:p>
+          <a:p>
+            <a:pPr>
+              <a:defRPr sz="1300">
+                <a:solidFill>
+                  <a:srgbClr val="F8FAFC"/>
+                </a:solidFill>
+              </a:defRPr>
+            </a:pPr>
+            <a:r>
+              <a:t>PostgreSQL, MySQL, Firebase Firestore, SQLite, Docker</a:t>
             </a:r>
           </a:p>
         </p:txBody>
@@ -3483,8 +3836,8 @@
         </p:nvSpPr>
         <p:spPr>
           <a:xfrm>
-            <a:off x="914400" y="914400"/>
-            <a:ext cx="10058400" cy="5029200"/>
+            <a:off x="731520" y="457200"/>
+            <a:ext cx="10728655" cy="914400"/>
           </a:xfrm>
           <a:prstGeom prst="rect">
             <a:avLst/>
@@ -3498,77 +3851,143 @@
           <a:lstStyle/>
           <a:p>
             <a:pPr>
-              <a:spcAft>
-                <a:spcPts val="2000"/>
-              </a:spcAft>
-              <a:defRPr sz="3200" b="1">
-                <a:solidFill>
-                  <a:srgbClr val="F1F5F9"/>
-                </a:solidFill>
-              </a:defRPr>
-            </a:pPr>
-            <a:r>
-              <a:t>Featured Project: Sales &amp; Warehouse Tracker</a:t>
-            </a:r>
-          </a:p>
-          <a:p>
-            <a:pPr>
-              <a:spcAft>
-                <a:spcPts val="2000"/>
-              </a:spcAft>
-              <a:defRPr sz="1800">
+              <a:defRPr sz="1100" b="1">
                 <a:solidFill>
                   <a:srgbClr val="06B6D4"/>
                 </a:solidFill>
-              </a:defRPr>
-            </a:pPr>
-            <a:r>
-              <a:t>Aplikasi Website Laporan Penjualan Realtime &amp; Gudang</a:t>
-            </a:r>
-          </a:p>
-          <a:p>
-            <a:pPr>
-              <a:spcAft>
-                <a:spcPts val="1000"/>
-              </a:spcAft>
-              <a:defRPr sz="1500">
-                <a:solidFill>
-                  <a:srgbClr val="94A3B8"/>
-                </a:solidFill>
-              </a:defRPr>
-            </a:pPr>
-            <a:r>
-              <a:t>✓ Rekapitulasi transaksi terpusat lintas platform penjualan digital.</a:t>
-            </a:r>
-          </a:p>
-          <a:p>
-            <a:pPr>
-              <a:spcAft>
-                <a:spcPts val="1000"/>
-              </a:spcAft>
-              <a:defRPr sz="1500">
-                <a:solidFill>
-                  <a:srgbClr val="94A3B8"/>
-                </a:solidFill>
-              </a:defRPr>
-            </a:pPr>
-            <a:r>
-              <a:t>✓ Manajemen stok gudang otomatis (stok terpantau secara real-time).</a:t>
-            </a:r>
-          </a:p>
-          <a:p>
-            <a:pPr>
-              <a:spcAft>
-                <a:spcPts val="1000"/>
-              </a:spcAft>
-              <a:defRPr sz="1500">
-                <a:solidFill>
-                  <a:srgbClr val="94A3B8"/>
-                </a:solidFill>
-              </a:defRPr>
-            </a:pPr>
-            <a:r>
-              <a:t>✓ Dashboard laporan penjualan dan visualisasi data yang memudahkan pemantauan bisnis.</a:t>
+                <a:latin typeface="Arial"/>
+              </a:defRPr>
+            </a:pPr>
+            <a:r>
+              <a:t>FEATURED AI PROJECT</a:t>
+            </a:r>
+          </a:p>
+          <a:p>
+            <a:pPr>
+              <a:defRPr sz="2600" b="1">
+                <a:solidFill>
+                  <a:srgbClr val="F8FAFC"/>
+                </a:solidFill>
+                <a:latin typeface="Arial"/>
+              </a:defRPr>
+            </a:pPr>
+            <a:r>
+              <a:t>ScentDNA — AI Fragrance Discovery Engine</a:t>
+            </a:r>
+          </a:p>
+        </p:txBody>
+      </p:sp>
+      <p:sp>
+        <p:nvSpPr>
+          <p:cNvPr id="3" name="Rounded Rectangle 2"/>
+          <p:cNvSpPr/>
+          <p:nvPr/>
+        </p:nvSpPr>
+        <p:spPr>
+          <a:xfrm>
+            <a:off x="731520" y="1645920"/>
+            <a:ext cx="10728655" cy="4389120"/>
+          </a:xfrm>
+          <a:prstGeom prst="roundRect">
+            <a:avLst/>
+          </a:prstGeom>
+          <a:solidFill>
+            <a:srgbClr val="1E293B"/>
+          </a:solidFill>
+          <a:ln>
+            <a:solidFill>
+              <a:srgbClr val="F43F5E"/>
+            </a:solidFill>
+          </a:ln>
+        </p:spPr>
+        <p:style>
+          <a:lnRef idx="1">
+            <a:schemeClr val="accent1"/>
+          </a:lnRef>
+          <a:fillRef idx="3">
+            <a:schemeClr val="accent1"/>
+          </a:fillRef>
+          <a:effectRef idx="2">
+            <a:schemeClr val="accent1"/>
+          </a:effectRef>
+          <a:fontRef idx="minor">
+            <a:schemeClr val="lt1"/>
+          </a:fontRef>
+        </p:style>
+        <p:txBody>
+          <a:bodyPr rtlCol="0" anchor="ctr" wrap="square" lIns="365760" tIns="274320"/>
+          <a:lstStyle/>
+          <a:p>
+            <a:pPr algn="ctr">
+              <a:defRPr b="1" sz="1800">
+                <a:solidFill>
+                  <a:srgbClr val="F43F5E"/>
+                </a:solidFill>
+              </a:defRPr>
+            </a:pPr>
+            <a:r>
+              <a:t>Mesin Rekomendasi Aroma Vector Search &amp; RAG AI (Dockerized)</a:t>
+            </a:r>
+          </a:p>
+          <a:p>
+            <a:pPr>
+              <a:defRPr sz="1200" b="1">
+                <a:solidFill>
+                  <a:srgbClr val="06B6D4"/>
+                </a:solidFill>
+              </a:defRPr>
+            </a:pPr>
+            <a:r>
+              <a:t>Tech Stack: FastAPI (Python), PyTorch, SentenceTransformers, pgvector (PostgreSQL), Docker, Gemini 2.5 Flash API</a:t>
+            </a:r>
+            <a:br/>
+          </a:p>
+          <a:p>
+            <a:pPr>
+              <a:defRPr sz="1300">
+                <a:solidFill>
+                  <a:srgbClr val="F8FAFC"/>
+                </a:solidFill>
+              </a:defRPr>
+            </a:pPr>
+            <a:r>
+              <a:t>✓  Semantic Vector Search: Menggunakan pembacaan kemiripan kosinus (&lt;=&gt;) berbasis pgvector PostgreSQL.</a:t>
+            </a:r>
+          </a:p>
+          <a:p>
+            <a:pPr>
+              <a:defRPr sz="1300">
+                <a:solidFill>
+                  <a:srgbClr val="F8FAFC"/>
+                </a:solidFill>
+              </a:defRPr>
+            </a:pPr>
+            <a:r>
+              <a:t>✓  RAG Gemini Consultant: Rekomendasi kontekstual terstruktur dari hasil pencarian vektor produk.</a:t>
+            </a:r>
+          </a:p>
+          <a:p>
+            <a:pPr>
+              <a:defRPr sz="1300">
+                <a:solidFill>
+                  <a:srgbClr val="F8FAFC"/>
+                </a:solidFill>
+              </a:defRPr>
+            </a:pPr>
+            <a:r>
+              <a:t>✓  Singleton Pattern (Dependency Injection): Restrukturisasi lifespan FastAPI untuk hemat alokasi RAM.</a:t>
+            </a:r>
+          </a:p>
+          <a:p>
+            <a:pPr>
+              <a:defRPr sz="1300">
+                <a:solidFill>
+                  <a:srgbClr val="F8FAFC"/>
+                </a:solidFill>
+              </a:defRPr>
+            </a:pPr>
+            <a:r>
+              <a:t>✓  Memory Hardening: Optimasi PyTorch CPU single-threading &amp; garbage collection aktif untuk stabilitas cloud deployment.</a:t>
             </a:r>
           </a:p>
         </p:txBody>
@@ -3607,8 +4026,8 @@
         </p:nvSpPr>
         <p:spPr>
           <a:xfrm>
-            <a:off x="914400" y="1645920"/>
-            <a:ext cx="10058400" cy="4114800"/>
+            <a:off x="731520" y="457200"/>
+            <a:ext cx="10728655" cy="914400"/>
           </a:xfrm>
           <a:prstGeom prst="rect">
             <a:avLst/>
@@ -3622,44 +4041,957 @@
           <a:lstStyle/>
           <a:p>
             <a:pPr>
-              <a:spcAft>
-                <a:spcPts val="1500"/>
-              </a:spcAft>
-              <a:defRPr sz="3600" b="1">
-                <a:solidFill>
-                  <a:srgbClr val="F1F5F9"/>
-                </a:solidFill>
-              </a:defRPr>
-            </a:pPr>
-            <a:r>
-              <a:t>Tertarik Bekerjasama?</a:t>
-            </a:r>
-          </a:p>
-          <a:p>
-            <a:pPr>
-              <a:spcAft>
-                <a:spcPts val="3500"/>
-              </a:spcAft>
-              <a:defRPr sz="1600">
+              <a:defRPr sz="1100" b="1">
+                <a:solidFill>
+                  <a:srgbClr val="06B6D4"/>
+                </a:solidFill>
+                <a:latin typeface="Arial"/>
+              </a:defRPr>
+            </a:pPr>
+            <a:r>
+              <a:t>FEATURED AI PROJECTS</a:t>
+            </a:r>
+          </a:p>
+          <a:p>
+            <a:pPr>
+              <a:defRPr sz="2600" b="1">
+                <a:solidFill>
+                  <a:srgbClr val="F8FAFC"/>
+                </a:solidFill>
+                <a:latin typeface="Arial"/>
+              </a:defRPr>
+            </a:pPr>
+            <a:r>
+              <a:t>AI Solutions: PodLearn AI &amp; Telegram Assistant</a:t>
+            </a:r>
+          </a:p>
+        </p:txBody>
+      </p:sp>
+      <p:sp>
+        <p:nvSpPr>
+          <p:cNvPr id="3" name="Rounded Rectangle 2"/>
+          <p:cNvSpPr/>
+          <p:nvPr/>
+        </p:nvSpPr>
+        <p:spPr>
+          <a:xfrm>
+            <a:off x="731520" y="1645920"/>
+            <a:ext cx="5120640" cy="4389120"/>
+          </a:xfrm>
+          <a:prstGeom prst="roundRect">
+            <a:avLst/>
+          </a:prstGeom>
+          <a:solidFill>
+            <a:srgbClr val="1E293B"/>
+          </a:solidFill>
+          <a:ln>
+            <a:solidFill>
+              <a:srgbClr val="8B5CF6"/>
+            </a:solidFill>
+          </a:ln>
+        </p:spPr>
+        <p:style>
+          <a:lnRef idx="1">
+            <a:schemeClr val="accent1"/>
+          </a:lnRef>
+          <a:fillRef idx="3">
+            <a:schemeClr val="accent1"/>
+          </a:fillRef>
+          <a:effectRef idx="2">
+            <a:schemeClr val="accent1"/>
+          </a:effectRef>
+          <a:fontRef idx="minor">
+            <a:schemeClr val="lt1"/>
+          </a:fontRef>
+        </p:style>
+        <p:txBody>
+          <a:bodyPr rtlCol="0" anchor="ctr" wrap="square" lIns="274320" tIns="274320"/>
+          <a:lstStyle/>
+          <a:p>
+            <a:pPr algn="ctr">
+              <a:defRPr b="1" sz="1600">
+                <a:solidFill>
+                  <a:srgbClr val="8B5CF6"/>
+                </a:solidFill>
+              </a:defRPr>
+            </a:pPr>
+            <a:r>
+              <a:t>PodLearn AI — Podcast &amp; Quiz</a:t>
+            </a:r>
+          </a:p>
+          <a:p>
+            <a:pPr>
+              <a:defRPr sz="1200">
                 <a:solidFill>
                   <a:srgbClr val="94A3B8"/>
                 </a:solidFill>
               </a:defRPr>
             </a:pPr>
             <a:r>
-              <a:t>Mari diskusikan kebutuhan proyek, pembuatan aplikasi custom, atau pengembangan sistem digital Anda bersama saya.</a:t>
-            </a:r>
-          </a:p>
-          <a:p>
-            <a:pPr>
-              <a:defRPr sz="2200" b="1">
+              <a:t>Mengubah file PDF/teks menjadi audio podcast 2 orang (Host &amp; Expert) secara otomatis.</a:t>
+            </a:r>
+            <a:br/>
+          </a:p>
+          <a:p>
+            <a:pPr>
+              <a:defRPr sz="1200">
+                <a:solidFill>
+                  <a:srgbClr val="F8FAFC"/>
+                </a:solidFill>
+              </a:defRPr>
+            </a:pPr>
+            <a:r>
+              <a:t>• Integrasi Gemini AI untuk naskah dialog.</a:t>
+            </a:r>
+          </a:p>
+          <a:p>
+            <a:pPr>
+              <a:defRPr sz="1200">
+                <a:solidFill>
+                  <a:srgbClr val="F8FAFC"/>
+                </a:solidFill>
+              </a:defRPr>
+            </a:pPr>
+            <a:r>
+              <a:t>• Microsoft Edge Neural TTS multi-suara.</a:t>
+            </a:r>
+          </a:p>
+          <a:p>
+            <a:pPr>
+              <a:defRPr sz="1200">
+                <a:solidFill>
+                  <a:srgbClr val="F8FAFC"/>
+                </a:solidFill>
+              </a:defRPr>
+            </a:pPr>
+            <a:r>
+              <a:t>• FFmpeg Concat untuk penggabungan audio.</a:t>
+            </a:r>
+          </a:p>
+          <a:p>
+            <a:pPr>
+              <a:defRPr sz="1200">
+                <a:solidFill>
+                  <a:srgbClr val="F8FAFC"/>
+                </a:solidFill>
+              </a:defRPr>
+            </a:pPr>
+            <a:r>
+              <a:t>• Generator 10 kuis evaluasi interaktif.</a:t>
+            </a:r>
+          </a:p>
+        </p:txBody>
+      </p:sp>
+      <p:sp>
+        <p:nvSpPr>
+          <p:cNvPr id="4" name="Rounded Rectangle 3"/>
+          <p:cNvSpPr/>
+          <p:nvPr/>
+        </p:nvSpPr>
+        <p:spPr>
+          <a:xfrm>
+            <a:off x="6217920" y="1645920"/>
+            <a:ext cx="5212080" cy="4389120"/>
+          </a:xfrm>
+          <a:prstGeom prst="roundRect">
+            <a:avLst/>
+          </a:prstGeom>
+          <a:solidFill>
+            <a:srgbClr val="1E293B"/>
+          </a:solidFill>
+          <a:ln>
+            <a:solidFill>
+              <a:srgbClr val="8B5CF6"/>
+            </a:solidFill>
+          </a:ln>
+        </p:spPr>
+        <p:style>
+          <a:lnRef idx="1">
+            <a:schemeClr val="accent1"/>
+          </a:lnRef>
+          <a:fillRef idx="3">
+            <a:schemeClr val="accent1"/>
+          </a:fillRef>
+          <a:effectRef idx="2">
+            <a:schemeClr val="accent1"/>
+          </a:effectRef>
+          <a:fontRef idx="minor">
+            <a:schemeClr val="lt1"/>
+          </a:fontRef>
+        </p:style>
+        <p:txBody>
+          <a:bodyPr rtlCol="0" anchor="ctr" wrap="square" lIns="274320" tIns="274320"/>
+          <a:lstStyle/>
+          <a:p>
+            <a:pPr algn="ctr">
+              <a:defRPr b="1" sz="1600">
+                <a:solidFill>
+                  <a:srgbClr val="8B5CF6"/>
+                </a:solidFill>
+              </a:defRPr>
+            </a:pPr>
+            <a:r>
+              <a:t>Telegram AI Assistant (Live 24/7)</a:t>
+            </a:r>
+          </a:p>
+          <a:p>
+            <a:pPr>
+              <a:defRPr sz="1200">
+                <a:solidFill>
+                  <a:srgbClr val="94A3B8"/>
+                </a:solidFill>
+              </a:defRPr>
+            </a:pPr>
+            <a:r>
+              <a:t>Bot Telegram personal cerdas yang aktif 24/7 di cloud server tanpa henti.</a:t>
+            </a:r>
+            <a:br/>
+          </a:p>
+          <a:p>
+            <a:pPr>
+              <a:defRPr sz="1200">
+                <a:solidFill>
+                  <a:srgbClr val="F8FAFC"/>
+                </a:solidFill>
+              </a:defRPr>
+            </a:pPr>
+            <a:r>
+              <a:t>• Model LLM Llama-3.3 70B via Groq API.</a:t>
+            </a:r>
+          </a:p>
+          <a:p>
+            <a:pPr>
+              <a:defRPr sz="1200">
+                <a:solidFill>
+                  <a:srgbClr val="F8FAFC"/>
+                </a:solidFill>
+              </a:defRPr>
+            </a:pPr>
+            <a:r>
+              <a:t>• Respon cerdas multibahasa real-time.</a:t>
+            </a:r>
+          </a:p>
+          <a:p>
+            <a:pPr>
+              <a:defRPr sz="1200">
+                <a:solidFill>
+                  <a:srgbClr val="F8FAFC"/>
+                </a:solidFill>
+              </a:defRPr>
+            </a:pPr>
+            <a:r>
+              <a:t>• System prompt kustom untuk persona unik.</a:t>
+            </a:r>
+          </a:p>
+          <a:p>
+            <a:pPr>
+              <a:defRPr sz="1200">
+                <a:solidFill>
+                  <a:srgbClr val="F8FAFC"/>
+                </a:solidFill>
+              </a:defRPr>
+            </a:pPr>
+            <a:r>
+              <a:t>• Deployed 24/7 di Railway Cloud.</a:t>
+            </a:r>
+          </a:p>
+        </p:txBody>
+      </p:sp>
+    </p:spTree>
+  </p:cSld>
+  <p:clrMapOvr>
+    <a:masterClrMapping/>
+  </p:clrMapOvr>
+</p:sld>
+</file>
+
+<file path=ppt/slides/slide6.xml><?xml version="1.0" encoding="utf-8"?>
+<p:sld xmlns:a="http://schemas.openxmlformats.org/drawingml/2006/main" xmlns:p="http://schemas.openxmlformats.org/presentationml/2006/main" xmlns:r="http://schemas.openxmlformats.org/officeDocument/2006/relationships">
+  <p:cSld>
+    <p:bg>
+      <p:bgPr>
+        <a:solidFill>
+          <a:srgbClr val="0F172A"/>
+        </a:solidFill>
+        <a:effectLst/>
+      </p:bgPr>
+    </p:bg>
+    <p:spTree>
+      <p:nvGrpSpPr>
+        <p:cNvPr id="1" name=""/>
+        <p:cNvGrpSpPr/>
+        <p:nvPr/>
+      </p:nvGrpSpPr>
+      <p:grpSpPr/>
+      <p:sp>
+        <p:nvSpPr>
+          <p:cNvPr id="2" name="TextBox 1"/>
+          <p:cNvSpPr txBox="1"/>
+          <p:nvPr/>
+        </p:nvSpPr>
+        <p:spPr>
+          <a:xfrm>
+            <a:off x="731520" y="457200"/>
+            <a:ext cx="10728655" cy="914400"/>
+          </a:xfrm>
+          <a:prstGeom prst="rect">
+            <a:avLst/>
+          </a:prstGeom>
+          <a:noFill/>
+        </p:spPr>
+        <p:txBody>
+          <a:bodyPr wrap="square">
+            <a:spAutoFit/>
+          </a:bodyPr>
+          <a:lstStyle/>
+          <a:p>
+            <a:pPr>
+              <a:defRPr sz="1100" b="1">
+                <a:solidFill>
+                  <a:srgbClr val="06B6D4"/>
+                </a:solidFill>
+                <a:latin typeface="Arial"/>
+              </a:defRPr>
+            </a:pPr>
+            <a:r>
+              <a:t>FUNCTIONAL SYSTEMS</a:t>
+            </a:r>
+          </a:p>
+          <a:p>
+            <a:pPr>
+              <a:defRPr sz="2600" b="1">
+                <a:solidFill>
+                  <a:srgbClr val="F8FAFC"/>
+                </a:solidFill>
+                <a:latin typeface="Arial"/>
+              </a:defRPr>
+            </a:pPr>
+            <a:r>
+              <a:t>Mobile &amp; Web Dashboard Systems</a:t>
+            </a:r>
+          </a:p>
+        </p:txBody>
+      </p:sp>
+      <p:sp>
+        <p:nvSpPr>
+          <p:cNvPr id="3" name="Rounded Rectangle 2"/>
+          <p:cNvSpPr/>
+          <p:nvPr/>
+        </p:nvSpPr>
+        <p:spPr>
+          <a:xfrm>
+            <a:off x="731520" y="1645920"/>
+            <a:ext cx="5120640" cy="4389120"/>
+          </a:xfrm>
+          <a:prstGeom prst="roundRect">
+            <a:avLst/>
+          </a:prstGeom>
+          <a:solidFill>
+            <a:srgbClr val="1E293B"/>
+          </a:solidFill>
+          <a:ln>
+            <a:solidFill>
+              <a:srgbClr val="F97316"/>
+            </a:solidFill>
+          </a:ln>
+        </p:spPr>
+        <p:style>
+          <a:lnRef idx="1">
+            <a:schemeClr val="accent1"/>
+          </a:lnRef>
+          <a:fillRef idx="3">
+            <a:schemeClr val="accent1"/>
+          </a:fillRef>
+          <a:effectRef idx="2">
+            <a:schemeClr val="accent1"/>
+          </a:effectRef>
+          <a:fontRef idx="minor">
+            <a:schemeClr val="lt1"/>
+          </a:fontRef>
+        </p:style>
+        <p:txBody>
+          <a:bodyPr rtlCol="0" anchor="ctr" wrap="square" lIns="274320" tIns="274320"/>
+          <a:lstStyle/>
+          <a:p>
+            <a:pPr algn="ctr">
+              <a:defRPr b="1" sz="1600">
+                <a:solidFill>
+                  <a:srgbClr val="F97316"/>
+                </a:solidFill>
+              </a:defRPr>
+            </a:pPr>
+            <a:r>
+              <a:t>LDR Anchor (React Native App)</a:t>
+            </a:r>
+          </a:p>
+          <a:p>
+            <a:pPr>
+              <a:defRPr sz="1200">
+                <a:solidFill>
+                  <a:srgbClr val="F8FAFC"/>
+                </a:solidFill>
+              </a:defRPr>
+            </a:pPr>
+            <a:r>
+              <a:t>• Aplikasi mobile Android khusus pasangan jarak jauh (LDR).</a:t>
+            </a:r>
+          </a:p>
+          <a:p>
+            <a:pPr>
+              <a:defRPr sz="1200">
+                <a:solidFill>
+                  <a:srgbClr val="F8FAFC"/>
+                </a:solidFill>
+              </a:defRPr>
+            </a:pPr>
+            <a:r>
+              <a:t>• Fitur Mood sharing real-time &amp; pelukan virtual interaktif.</a:t>
+            </a:r>
+          </a:p>
+          <a:p>
+            <a:pPr>
+              <a:defRPr sz="1200">
+                <a:solidFill>
+                  <a:srgbClr val="F8FAFC"/>
+                </a:solidFill>
+              </a:defRPr>
+            </a:pPr>
+            <a:r>
+              <a:t>• Integrasi FCM V1 Push Notification via Expo.</a:t>
+            </a:r>
+          </a:p>
+          <a:p>
+            <a:pPr>
+              <a:defRPr sz="1200">
+                <a:solidFill>
+                  <a:srgbClr val="F8FAFC"/>
+                </a:solidFill>
+              </a:defRPr>
+            </a:pPr>
+            <a:r>
+              <a:t>• Firebase Firestore &amp; Auth backend integration.</a:t>
+            </a:r>
+          </a:p>
+        </p:txBody>
+      </p:sp>
+      <p:sp>
+        <p:nvSpPr>
+          <p:cNvPr id="4" name="Rounded Rectangle 3"/>
+          <p:cNvSpPr/>
+          <p:nvPr/>
+        </p:nvSpPr>
+        <p:spPr>
+          <a:xfrm>
+            <a:off x="6217920" y="1645920"/>
+            <a:ext cx="5212080" cy="4389120"/>
+          </a:xfrm>
+          <a:prstGeom prst="roundRect">
+            <a:avLst/>
+          </a:prstGeom>
+          <a:solidFill>
+            <a:srgbClr val="1E293B"/>
+          </a:solidFill>
+          <a:ln>
+            <a:solidFill>
+              <a:srgbClr val="06B6D4"/>
+            </a:solidFill>
+          </a:ln>
+        </p:spPr>
+        <p:style>
+          <a:lnRef idx="1">
+            <a:schemeClr val="accent1"/>
+          </a:lnRef>
+          <a:fillRef idx="3">
+            <a:schemeClr val="accent1"/>
+          </a:fillRef>
+          <a:effectRef idx="2">
+            <a:schemeClr val="accent1"/>
+          </a:effectRef>
+          <a:fontRef idx="minor">
+            <a:schemeClr val="lt1"/>
+          </a:fontRef>
+        </p:style>
+        <p:txBody>
+          <a:bodyPr rtlCol="0" anchor="ctr" wrap="square" lIns="274320" tIns="274320"/>
+          <a:lstStyle/>
+          <a:p>
+            <a:pPr algn="ctr">
+              <a:defRPr b="1" sz="1600">
+                <a:solidFill>
+                  <a:srgbClr val="06B6D4"/>
+                </a:solidFill>
+              </a:defRPr>
+            </a:pPr>
+            <a:r>
+              <a:t>Clinical Suite Dashboard</a:t>
+            </a:r>
+          </a:p>
+          <a:p>
+            <a:pPr>
+              <a:defRPr sz="1200">
+                <a:solidFill>
+                  <a:srgbClr val="F8FAFC"/>
+                </a:solidFill>
+              </a:defRPr>
+            </a:pPr>
+            <a:r>
+              <a:t>• Sistem rekapitulasi data medis &amp; manajemen klinis.</a:t>
+            </a:r>
+          </a:p>
+          <a:p>
+            <a:pPr>
+              <a:defRPr sz="1200">
+                <a:solidFill>
+                  <a:srgbClr val="F8FAFC"/>
+                </a:solidFill>
+              </a:defRPr>
+            </a:pPr>
+            <a:r>
+              <a:t>• Kalkulator parameter medis fungsional otomatis.</a:t>
+            </a:r>
+          </a:p>
+          <a:p>
+            <a:pPr>
+              <a:defRPr sz="1200">
+                <a:solidFill>
+                  <a:srgbClr val="F8FAFC"/>
+                </a:solidFill>
+              </a:defRPr>
+            </a:pPr>
+            <a:r>
+              <a:t>• Antarmuka bersih &amp; presisi tinggi berbasis Tailwind.</a:t>
+            </a:r>
+          </a:p>
+          <a:p>
+            <a:pPr>
+              <a:defRPr sz="1200">
+                <a:solidFill>
+                  <a:srgbClr val="F8FAFC"/>
+                </a:solidFill>
+              </a:defRPr>
+            </a:pPr>
+            <a:r>
+              <a:t>• Dirancang khusus untuk efisiensi operasional medis.</a:t>
+            </a:r>
+          </a:p>
+        </p:txBody>
+      </p:sp>
+    </p:spTree>
+  </p:cSld>
+  <p:clrMapOvr>
+    <a:masterClrMapping/>
+  </p:clrMapOvr>
+</p:sld>
+</file>
+
+<file path=ppt/slides/slide7.xml><?xml version="1.0" encoding="utf-8"?>
+<p:sld xmlns:a="http://schemas.openxmlformats.org/drawingml/2006/main" xmlns:p="http://schemas.openxmlformats.org/presentationml/2006/main" xmlns:r="http://schemas.openxmlformats.org/officeDocument/2006/relationships">
+  <p:cSld>
+    <p:bg>
+      <p:bgPr>
+        <a:solidFill>
+          <a:srgbClr val="0F172A"/>
+        </a:solidFill>
+        <a:effectLst/>
+      </p:bgPr>
+    </p:bg>
+    <p:spTree>
+      <p:nvGrpSpPr>
+        <p:cNvPr id="1" name=""/>
+        <p:cNvGrpSpPr/>
+        <p:nvPr/>
+      </p:nvGrpSpPr>
+      <p:grpSpPr/>
+      <p:sp>
+        <p:nvSpPr>
+          <p:cNvPr id="2" name="TextBox 1"/>
+          <p:cNvSpPr txBox="1"/>
+          <p:nvPr/>
+        </p:nvSpPr>
+        <p:spPr>
+          <a:xfrm>
+            <a:off x="731520" y="457200"/>
+            <a:ext cx="10728655" cy="914400"/>
+          </a:xfrm>
+          <a:prstGeom prst="rect">
+            <a:avLst/>
+          </a:prstGeom>
+          <a:noFill/>
+        </p:spPr>
+        <p:txBody>
+          <a:bodyPr wrap="square">
+            <a:spAutoFit/>
+          </a:bodyPr>
+          <a:lstStyle/>
+          <a:p>
+            <a:pPr>
+              <a:defRPr sz="1100" b="1">
+                <a:solidFill>
+                  <a:srgbClr val="06B6D4"/>
+                </a:solidFill>
+                <a:latin typeface="Arial"/>
+              </a:defRPr>
+            </a:pPr>
+            <a:r>
+              <a:t>WEB APPLICATIONS</a:t>
+            </a:r>
+          </a:p>
+          <a:p>
+            <a:pPr>
+              <a:defRPr sz="2600" b="1">
+                <a:solidFill>
+                  <a:srgbClr val="F8FAFC"/>
+                </a:solidFill>
+                <a:latin typeface="Arial"/>
+              </a:defRPr>
+            </a:pPr>
+            <a:r>
+              <a:t>Enterprise Serverless &amp; Laravel Systems</a:t>
+            </a:r>
+          </a:p>
+        </p:txBody>
+      </p:sp>
+      <p:sp>
+        <p:nvSpPr>
+          <p:cNvPr id="3" name="Rounded Rectangle 2"/>
+          <p:cNvSpPr/>
+          <p:nvPr/>
+        </p:nvSpPr>
+        <p:spPr>
+          <a:xfrm>
+            <a:off x="731520" y="1645920"/>
+            <a:ext cx="5120640" cy="4389120"/>
+          </a:xfrm>
+          <a:prstGeom prst="roundRect">
+            <a:avLst/>
+          </a:prstGeom>
+          <a:solidFill>
+            <a:srgbClr val="1E293B"/>
+          </a:solidFill>
+          <a:ln>
+            <a:solidFill>
+              <a:srgbClr val="0284C7"/>
+            </a:solidFill>
+          </a:ln>
+        </p:spPr>
+        <p:style>
+          <a:lnRef idx="1">
+            <a:schemeClr val="accent1"/>
+          </a:lnRef>
+          <a:fillRef idx="3">
+            <a:schemeClr val="accent1"/>
+          </a:fillRef>
+          <a:effectRef idx="2">
+            <a:schemeClr val="accent1"/>
+          </a:effectRef>
+          <a:fontRef idx="minor">
+            <a:schemeClr val="lt1"/>
+          </a:fontRef>
+        </p:style>
+        <p:txBody>
+          <a:bodyPr rtlCol="0" anchor="ctr" wrap="square" lIns="274320" tIns="274320"/>
+          <a:lstStyle/>
+          <a:p>
+            <a:pPr algn="ctr">
+              <a:defRPr b="1" sz="1600">
+                <a:solidFill>
+                  <a:srgbClr val="0284C7"/>
+                </a:solidFill>
+              </a:defRPr>
+            </a:pPr>
+            <a:r>
+              <a:t>Cloud Inventory System (Serverless)</a:t>
+            </a:r>
+          </a:p>
+          <a:p>
+            <a:pPr>
+              <a:defRPr sz="1200">
+                <a:solidFill>
+                  <a:srgbClr val="F8FAFC"/>
+                </a:solidFill>
+              </a:defRPr>
+            </a:pPr>
+            <a:r>
+              <a:t>• Sistem inventaris berbasis Google Apps Script.</a:t>
+            </a:r>
+          </a:p>
+          <a:p>
+            <a:pPr>
+              <a:defRPr sz="1200">
+                <a:solidFill>
+                  <a:srgbClr val="F8FAFC"/>
+                </a:solidFill>
+              </a:defRPr>
+            </a:pPr>
+            <a:r>
+              <a:t>• Concurrency Protection via LockService.</a:t>
+            </a:r>
+          </a:p>
+          <a:p>
+            <a:pPr>
+              <a:defRPr sz="1200">
+                <a:solidFill>
+                  <a:srgbClr val="F8FAFC"/>
+                </a:solidFill>
+              </a:defRPr>
+            </a:pPr>
+            <a:r>
+              <a:t>• Role-Based Access Control (RBAC) &amp; Anti-XSS.</a:t>
+            </a:r>
+          </a:p>
+          <a:p>
+            <a:pPr>
+              <a:defRPr sz="1200">
+                <a:solidFill>
+                  <a:srgbClr val="F8FAFC"/>
+                </a:solidFill>
+              </a:defRPr>
+            </a:pPr>
+            <a:r>
+              <a:t>• Audit Trail log &amp; snapshot auto-backup ke Drive.</a:t>
+            </a:r>
+          </a:p>
+        </p:txBody>
+      </p:sp>
+      <p:sp>
+        <p:nvSpPr>
+          <p:cNvPr id="4" name="Rounded Rectangle 3"/>
+          <p:cNvSpPr/>
+          <p:nvPr/>
+        </p:nvSpPr>
+        <p:spPr>
+          <a:xfrm>
+            <a:off x="6217920" y="1645920"/>
+            <a:ext cx="5212080" cy="4389120"/>
+          </a:xfrm>
+          <a:prstGeom prst="roundRect">
+            <a:avLst/>
+          </a:prstGeom>
+          <a:solidFill>
+            <a:srgbClr val="1E293B"/>
+          </a:solidFill>
+          <a:ln>
+            <a:solidFill>
+              <a:srgbClr val="10B981"/>
+            </a:solidFill>
+          </a:ln>
+        </p:spPr>
+        <p:style>
+          <a:lnRef idx="1">
+            <a:schemeClr val="accent1"/>
+          </a:lnRef>
+          <a:fillRef idx="3">
+            <a:schemeClr val="accent1"/>
+          </a:fillRef>
+          <a:effectRef idx="2">
+            <a:schemeClr val="accent1"/>
+          </a:effectRef>
+          <a:fontRef idx="minor">
+            <a:schemeClr val="lt1"/>
+          </a:fontRef>
+        </p:style>
+        <p:txBody>
+          <a:bodyPr rtlCol="0" anchor="ctr" wrap="square" lIns="274320" tIns="274320"/>
+          <a:lstStyle/>
+          <a:p>
+            <a:pPr algn="ctr">
+              <a:defRPr b="1" sz="1600">
                 <a:solidFill>
                   <a:srgbClr val="10B981"/>
                 </a:solidFill>
               </a:defRPr>
             </a:pPr>
             <a:r>
-              <a:t>📱 WhatsApp: +62 895-4147-81707</a:t>
+              <a:t>Domain Explorer (Laravel 11)</a:t>
+            </a:r>
+          </a:p>
+          <a:p>
+            <a:pPr>
+              <a:defRPr sz="1200">
+                <a:solidFill>
+                  <a:srgbClr val="F8FAFC"/>
+                </a:solidFill>
+              </a:defRPr>
+            </a:pPr>
+            <a:r>
+              <a:t>• Aplikasi manajemen domain berbasis Laravel 11.</a:t>
+            </a:r>
+          </a:p>
+          <a:p>
+            <a:pPr>
+              <a:defRPr sz="1200">
+                <a:solidFill>
+                  <a:srgbClr val="F8FAFC"/>
+                </a:solidFill>
+              </a:defRPr>
+            </a:pPr>
+            <a:r>
+              <a:t>• Arsitektur MVC bersih dengan Blade views.</a:t>
+            </a:r>
+          </a:p>
+          <a:p>
+            <a:pPr>
+              <a:defRPr sz="1200">
+                <a:solidFill>
+                  <a:srgbClr val="F8FAFC"/>
+                </a:solidFill>
+              </a:defRPr>
+            </a:pPr>
+            <a:r>
+              <a:t>• Penggunaan SQLite database untuk performa ringan.</a:t>
+            </a:r>
+          </a:p>
+          <a:p>
+            <a:pPr>
+              <a:defRPr sz="1200">
+                <a:solidFill>
+                  <a:srgbClr val="F8FAFC"/>
+                </a:solidFill>
+              </a:defRPr>
+            </a:pPr>
+            <a:r>
+              <a:t>• Database Migrations &amp; Seeders otomatis.</a:t>
+            </a:r>
+          </a:p>
+        </p:txBody>
+      </p:sp>
+    </p:spTree>
+  </p:cSld>
+  <p:clrMapOvr>
+    <a:masterClrMapping/>
+  </p:clrMapOvr>
+</p:sld>
+</file>
+
+<file path=ppt/slides/slide8.xml><?xml version="1.0" encoding="utf-8"?>
+<p:sld xmlns:a="http://schemas.openxmlformats.org/drawingml/2006/main" xmlns:p="http://schemas.openxmlformats.org/presentationml/2006/main" xmlns:r="http://schemas.openxmlformats.org/officeDocument/2006/relationships">
+  <p:cSld>
+    <p:bg>
+      <p:bgPr>
+        <a:solidFill>
+          <a:srgbClr val="0F172A"/>
+        </a:solidFill>
+        <a:effectLst/>
+      </p:bgPr>
+    </p:bg>
+    <p:spTree>
+      <p:nvGrpSpPr>
+        <p:cNvPr id="1" name=""/>
+        <p:cNvGrpSpPr/>
+        <p:nvPr/>
+      </p:nvGrpSpPr>
+      <p:grpSpPr/>
+      <p:sp>
+        <p:nvSpPr>
+          <p:cNvPr id="2" name="Rounded Rectangle 1"/>
+          <p:cNvSpPr/>
+          <p:nvPr/>
+        </p:nvSpPr>
+        <p:spPr>
+          <a:xfrm>
+            <a:off x="1371600" y="1371600"/>
+            <a:ext cx="9448495" cy="4114800"/>
+          </a:xfrm>
+          <a:prstGeom prst="roundRect">
+            <a:avLst/>
+          </a:prstGeom>
+          <a:solidFill>
+            <a:srgbClr val="1E293B"/>
+          </a:solidFill>
+          <a:ln>
+            <a:solidFill>
+              <a:srgbClr val="06B6D4"/>
+            </a:solidFill>
+          </a:ln>
+        </p:spPr>
+        <p:style>
+          <a:lnRef idx="1">
+            <a:schemeClr val="accent1"/>
+          </a:lnRef>
+          <a:fillRef idx="3">
+            <a:schemeClr val="accent1"/>
+          </a:fillRef>
+          <a:effectRef idx="2">
+            <a:schemeClr val="accent1"/>
+          </a:effectRef>
+          <a:fontRef idx="minor">
+            <a:schemeClr val="lt1"/>
+          </a:fontRef>
+        </p:style>
+        <p:txBody>
+          <a:bodyPr rtlCol="0" anchor="ctr" wrap="square" lIns="457200" tIns="457200"/>
+          <a:lstStyle/>
+          <a:p>
+            <a:pPr algn="ctr">
+              <a:defRPr b="1" sz="2800">
+                <a:solidFill>
+                  <a:srgbClr val="06B6D4"/>
+                </a:solidFill>
+              </a:defRPr>
+            </a:pPr>
+            <a:r>
+              <a:t>Mari Berkolaborasi!</a:t>
+            </a:r>
+          </a:p>
+          <a:p>
+            <a:pPr>
+              <a:defRPr sz="1400">
+                <a:solidFill>
+                  <a:srgbClr val="F8FAFC"/>
+                </a:solidFill>
+              </a:defRPr>
+            </a:pPr>
+            <a:r>
+              <a:t>Terbuka untuk proyek freelance, pengembangan sistem kustom, maupun posisi software engineer.</a:t>
+            </a:r>
+            <a:br/>
+          </a:p>
+          <a:p>
+            <a:pPr>
+              <a:defRPr sz="1500">
+                <a:solidFill>
+                  <a:srgbClr val="94A3B8"/>
+                </a:solidFill>
+              </a:defRPr>
+            </a:pPr>
+            <a:r>
+              <a:t>📱 WhatsApp : +62 895-4147-81707</a:t>
+            </a:r>
+          </a:p>
+          <a:p>
+            <a:pPr>
+              <a:defRPr sz="1500">
+                <a:solidFill>
+                  <a:srgbClr val="94A3B8"/>
+                </a:solidFill>
+              </a:defRPr>
+            </a:pPr>
+            <a:r>
+              <a:t>✉️ Email    : ulula2812@gmail.com</a:t>
+            </a:r>
+          </a:p>
+          <a:p>
+            <a:pPr>
+              <a:defRPr sz="1500">
+                <a:solidFill>
+                  <a:srgbClr val="94A3B8"/>
+                </a:solidFill>
+              </a:defRPr>
+            </a:pPr>
+            <a:r>
+              <a:t>🌐 Portofolio: scentdna-5646.vercel.app</a:t>
+            </a:r>
+          </a:p>
+          <a:p>
+            <a:pPr>
+              <a:defRPr sz="1500">
+                <a:solidFill>
+                  <a:srgbClr val="94A3B8"/>
+                </a:solidFill>
+              </a:defRPr>
+            </a:pPr>
+            <a:r>
+              <a:t>📍 Lokasi   : Bogor, Jawa Barat, Indonesia</a:t>
             </a:r>
           </a:p>
         </p:txBody>

--- a/Portfolio_Muhammad_Ulul_Albab.pptx
+++ b/Portfolio_Muhammad_Ulul_Albab.pptx
@@ -4979,7 +4979,7 @@
               </a:defRPr>
             </a:pPr>
             <a:r>
-              <a:t>🌐 Portofolio: scentdna-5646.vercel.app</a:t>
+              <a:t>🌐 Portofolio: https://ulul-portofolio-3odd.vercel.app/</a:t>
             </a:r>
           </a:p>
           <a:p>

--- a/Portfolio_Muhammad_Ulul_Albab.pptx
+++ b/Portfolio_Muhammad_Ulul_Albab.pptx
@@ -13,6 +13,7 @@
     <p:sldId id="261" r:id="rId12"/>
     <p:sldId id="262" r:id="rId13"/>
     <p:sldId id="263" r:id="rId14"/>
+    <p:sldId id="264" r:id="rId15"/>
   </p:sldIdLst>
   <p:sldSz cx="12191695" cy="6858000" type="screen4x3"/>
   <p:notesSz cx="6858000" cy="9144000"/>
@@ -3599,7 +3600,7 @@
               </a:defRPr>
             </a:pPr>
             <a:r>
-              <a:t>React, React Native, Expo, Tailwind CSS, Vite, HTML/JS</a:t>
+              <a:t>React, React Native, Expo SDK 54, Tailwind CSS, Vite, HTML/JS</a:t>
             </a:r>
           </a:p>
         </p:txBody>
@@ -3665,7 +3666,7 @@
               </a:defRPr>
             </a:pPr>
             <a:r>
-              <a:t>FastAPI (Python), Laravel 11 (PHP), Node.js / Express</a:t>
+              <a:t>FastAPI (Python), Laravel 11 (PHP), Node.js / Express, Firebase</a:t>
             </a:r>
           </a:p>
         </p:txBody>
@@ -3797,7 +3798,7 @@
               </a:defRPr>
             </a:pPr>
             <a:r>
-              <a:t>PostgreSQL, MySQL, Firebase Firestore, SQLite, Docker</a:t>
+              <a:t>PostgreSQL, MySQL, Firebase Firestore, SQLite, Docker, Vercel</a:t>
             </a:r>
           </a:p>
         </p:txBody>
@@ -3811,6 +3812,196 @@
 </file>
 
 <file path=ppt/slides/slide4.xml><?xml version="1.0" encoding="utf-8"?>
+<p:sld xmlns:a="http://schemas.openxmlformats.org/drawingml/2006/main" xmlns:p="http://schemas.openxmlformats.org/presentationml/2006/main" xmlns:r="http://schemas.openxmlformats.org/officeDocument/2006/relationships">
+  <p:cSld>
+    <p:bg>
+      <p:bgPr>
+        <a:solidFill>
+          <a:srgbClr val="0F172A"/>
+        </a:solidFill>
+        <a:effectLst/>
+      </p:bgPr>
+    </p:bg>
+    <p:spTree>
+      <p:nvGrpSpPr>
+        <p:cNvPr id="1" name=""/>
+        <p:cNvGrpSpPr/>
+        <p:nvPr/>
+      </p:nvGrpSpPr>
+      <p:grpSpPr/>
+      <p:sp>
+        <p:nvSpPr>
+          <p:cNvPr id="2" name="TextBox 1"/>
+          <p:cNvSpPr txBox="1"/>
+          <p:nvPr/>
+        </p:nvSpPr>
+        <p:spPr>
+          <a:xfrm>
+            <a:off x="731520" y="457200"/>
+            <a:ext cx="10728655" cy="914400"/>
+          </a:xfrm>
+          <a:prstGeom prst="rect">
+            <a:avLst/>
+          </a:prstGeom>
+          <a:noFill/>
+        </p:spPr>
+        <p:txBody>
+          <a:bodyPr wrap="square">
+            <a:spAutoFit/>
+          </a:bodyPr>
+          <a:lstStyle/>
+          <a:p>
+            <a:pPr>
+              <a:defRPr sz="1100" b="1">
+                <a:solidFill>
+                  <a:srgbClr val="06B6D4"/>
+                </a:solidFill>
+                <a:latin typeface="Arial"/>
+              </a:defRPr>
+            </a:pPr>
+            <a:r>
+              <a:t>FEATURED ENTERPRISE &amp; MOBILE PROJECT</a:t>
+            </a:r>
+          </a:p>
+          <a:p>
+            <a:pPr>
+              <a:defRPr sz="2600" b="1">
+                <a:solidFill>
+                  <a:srgbClr val="F8FAFC"/>
+                </a:solidFill>
+                <a:latin typeface="Arial"/>
+              </a:defRPr>
+            </a:pPr>
+            <a:r>
+              <a:t>SchoolCom — School Management &amp; Communication System</a:t>
+            </a:r>
+          </a:p>
+        </p:txBody>
+      </p:sp>
+      <p:sp>
+        <p:nvSpPr>
+          <p:cNvPr id="3" name="Rounded Rectangle 2"/>
+          <p:cNvSpPr/>
+          <p:nvPr/>
+        </p:nvSpPr>
+        <p:spPr>
+          <a:xfrm>
+            <a:off x="731520" y="1645920"/>
+            <a:ext cx="10728655" cy="4389120"/>
+          </a:xfrm>
+          <a:prstGeom prst="roundRect">
+            <a:avLst/>
+          </a:prstGeom>
+          <a:solidFill>
+            <a:srgbClr val="1E293B"/>
+          </a:solidFill>
+          <a:ln>
+            <a:solidFill>
+              <a:srgbClr val="2563EB"/>
+            </a:solidFill>
+          </a:ln>
+        </p:spPr>
+        <p:style>
+          <a:lnRef idx="1">
+            <a:schemeClr val="accent1"/>
+          </a:lnRef>
+          <a:fillRef idx="3">
+            <a:schemeClr val="accent1"/>
+          </a:fillRef>
+          <a:effectRef idx="2">
+            <a:schemeClr val="accent1"/>
+          </a:effectRef>
+          <a:fontRef idx="minor">
+            <a:schemeClr val="lt1"/>
+          </a:fontRef>
+        </p:style>
+        <p:txBody>
+          <a:bodyPr rtlCol="0" anchor="ctr" wrap="square" lIns="365760" tIns="274320"/>
+          <a:lstStyle/>
+          <a:p>
+            <a:pPr algn="ctr">
+              <a:defRPr b="1" sz="1800">
+                <a:solidFill>
+                  <a:srgbClr val="2563EB"/>
+                </a:solidFill>
+              </a:defRPr>
+            </a:pPr>
+            <a:r>
+              <a:t>Sistem Pengelolaan &amp; Komunikasi Sekolah Terpadu 3 Peran (Android &amp; Web)</a:t>
+            </a:r>
+          </a:p>
+          <a:p>
+            <a:pPr>
+              <a:defRPr sz="1200" b="1">
+                <a:solidFill>
+                  <a:srgbClr val="06B6D4"/>
+                </a:solidFill>
+              </a:defRPr>
+            </a:pPr>
+            <a:r>
+              <a:t>Tech Stack: React Native (Expo SDK 54), Firebase Firestore/Auth, React, Vite, Tailwind CSS v4, Vercel</a:t>
+            </a:r>
+            <a:br/>
+          </a:p>
+          <a:p>
+            <a:pPr>
+              <a:defRPr sz="1300">
+                <a:solidFill>
+                  <a:srgbClr val="F8FAFC"/>
+                </a:solidFill>
+              </a:defRPr>
+            </a:pPr>
+            <a:r>
+              <a:t>✓  Role-Based Architecture (RBAC): Tiga antarmuka terpisah khusus untuk Admin Sekolah, Guru Kelas, dan Orang Tua.</a:t>
+            </a:r>
+          </a:p>
+          <a:p>
+            <a:pPr>
+              <a:defRPr sz="1300">
+                <a:solidFill>
+                  <a:srgbClr val="F8FAFC"/>
+                </a:solidFill>
+              </a:defRPr>
+            </a:pPr>
+            <a:r>
+              <a:t>✓  Module Auditability: 40 modul teraudit mencakup presensi harian batch, penginputan nilai rapor, &amp; rekapitulasi.</a:t>
+            </a:r>
+          </a:p>
+          <a:p>
+            <a:pPr>
+              <a:defRPr sz="1300">
+                <a:solidFill>
+                  <a:srgbClr val="F8FAFC"/>
+                </a:solidFill>
+              </a:defRPr>
+            </a:pPr>
+            <a:r>
+              <a:t>✓  Parent-Child Scoping: Transparansi pemantauan kehadiran dan catatan insiden/perilaku siswa secara aman.</a:t>
+            </a:r>
+          </a:p>
+          <a:p>
+            <a:pPr>
+              <a:defRPr sz="1300">
+                <a:solidFill>
+                  <a:srgbClr val="F8FAFC"/>
+                </a:solidFill>
+              </a:defRPr>
+            </a:pPr>
+            <a:r>
+              <a:t>✓  Landing Page &amp; Conversion: Landing page khusus Vercel terintegrasi ke WhatsApp (+62895414781707) untuk permintaan demo.</a:t>
+            </a:r>
+          </a:p>
+        </p:txBody>
+      </p:sp>
+    </p:spTree>
+  </p:cSld>
+  <p:clrMapOvr>
+    <a:masterClrMapping/>
+  </p:clrMapOvr>
+</p:sld>
+</file>
+
+<file path=ppt/slides/slide5.xml><?xml version="1.0" encoding="utf-8"?>
 <p:sld xmlns:a="http://schemas.openxmlformats.org/drawingml/2006/main" xmlns:p="http://schemas.openxmlformats.org/presentationml/2006/main" xmlns:r="http://schemas.openxmlformats.org/officeDocument/2006/relationships">
   <p:cSld>
     <p:bg>
@@ -4000,7 +4191,7 @@
 </p:sld>
 </file>
 
-<file path=ppt/slides/slide5.xml><?xml version="1.0" encoding="utf-8"?>
+<file path=ppt/slides/slide6.xml><?xml version="1.0" encoding="utf-8"?>
 <p:sld xmlns:a="http://schemas.openxmlformats.org/drawingml/2006/main" xmlns:p="http://schemas.openxmlformats.org/presentationml/2006/main" xmlns:r="http://schemas.openxmlformats.org/officeDocument/2006/relationships">
   <p:cSld>
     <p:bg>
@@ -4305,7 +4496,7 @@
 </p:sld>
 </file>
 
-<file path=ppt/slides/slide6.xml><?xml version="1.0" encoding="utf-8"?>
+<file path=ppt/slides/slide7.xml><?xml version="1.0" encoding="utf-8"?>
 <p:sld xmlns:a="http://schemas.openxmlformats.org/drawingml/2006/main" xmlns:p="http://schemas.openxmlformats.org/presentationml/2006/main" xmlns:r="http://schemas.openxmlformats.org/officeDocument/2006/relationships">
   <p:cSld>
     <p:bg>
@@ -4584,7 +4775,7 @@
 </p:sld>
 </file>
 
-<file path=ppt/slides/slide7.xml><?xml version="1.0" encoding="utf-8"?>
+<file path=ppt/slides/slide8.xml><?xml version="1.0" encoding="utf-8"?>
 <p:sld xmlns:a="http://schemas.openxmlformats.org/drawingml/2006/main" xmlns:p="http://schemas.openxmlformats.org/presentationml/2006/main" xmlns:r="http://schemas.openxmlformats.org/officeDocument/2006/relationships">
   <p:cSld>
     <p:bg>
@@ -4863,7 +5054,7 @@
 </p:sld>
 </file>
 
-<file path=ppt/slides/slide8.xml><?xml version="1.0" encoding="utf-8"?>
+<file path=ppt/slides/slide9.xml><?xml version="1.0" encoding="utf-8"?>
 <p:sld xmlns:a="http://schemas.openxmlformats.org/drawingml/2006/main" xmlns:p="http://schemas.openxmlformats.org/presentationml/2006/main" xmlns:r="http://schemas.openxmlformats.org/officeDocument/2006/relationships">
   <p:cSld>
     <p:bg>
